--- a/2026/LEC/04-2  анализ невязок предсказаний ВР.pptx
+++ b/2026/LEC/04-2  анализ невязок предсказаний ВР.pptx
@@ -244,7 +244,7 @@
           <a:p>
             <a:fld id="{C730246F-5962-E14A-AAF2-985CCFDAC345}" type="datetimeFigureOut">
               <a:rPr lang="ru-RU" smtClean="0"/>
-              <a:t>20.08.2025</a:t>
+              <a:t>26.03.2026</a:t>
             </a:fld>
             <a:endParaRPr lang="ru-RU"/>
           </a:p>
@@ -1152,7 +1152,7 @@
           <a:p>
             <a:fld id="{44343DC6-30E4-4569-999A-C703F926F2AF}" type="datetimeFigureOut">
               <a:rPr lang="en-US" smtClean="0"/>
-              <a:t>8/20/2025</a:t>
+              <a:t>3/26/2026</a:t>
             </a:fld>
             <a:endParaRPr lang="en-US"/>
           </a:p>
@@ -1352,7 +1352,7 @@
           <a:p>
             <a:fld id="{44343DC6-30E4-4569-999A-C703F926F2AF}" type="datetimeFigureOut">
               <a:rPr lang="en-US" smtClean="0"/>
-              <a:t>8/20/2025</a:t>
+              <a:t>3/26/2026</a:t>
             </a:fld>
             <a:endParaRPr lang="en-US"/>
           </a:p>
@@ -1562,7 +1562,7 @@
           <a:p>
             <a:fld id="{44343DC6-30E4-4569-999A-C703F926F2AF}" type="datetimeFigureOut">
               <a:rPr lang="en-US" smtClean="0"/>
-              <a:t>8/20/2025</a:t>
+              <a:t>3/26/2026</a:t>
             </a:fld>
             <a:endParaRPr lang="en-US"/>
           </a:p>
@@ -1762,7 +1762,7 @@
           <a:p>
             <a:fld id="{44343DC6-30E4-4569-999A-C703F926F2AF}" type="datetimeFigureOut">
               <a:rPr lang="en-US" smtClean="0"/>
-              <a:t>8/20/2025</a:t>
+              <a:t>3/26/2026</a:t>
             </a:fld>
             <a:endParaRPr lang="en-US"/>
           </a:p>
@@ -2038,7 +2038,7 @@
           <a:p>
             <a:fld id="{44343DC6-30E4-4569-999A-C703F926F2AF}" type="datetimeFigureOut">
               <a:rPr lang="en-US" smtClean="0"/>
-              <a:t>8/20/2025</a:t>
+              <a:t>3/26/2026</a:t>
             </a:fld>
             <a:endParaRPr lang="en-US"/>
           </a:p>
@@ -2306,7 +2306,7 @@
           <a:p>
             <a:fld id="{44343DC6-30E4-4569-999A-C703F926F2AF}" type="datetimeFigureOut">
               <a:rPr lang="en-US" smtClean="0"/>
-              <a:t>8/20/2025</a:t>
+              <a:t>3/26/2026</a:t>
             </a:fld>
             <a:endParaRPr lang="en-US"/>
           </a:p>
@@ -2721,7 +2721,7 @@
           <a:p>
             <a:fld id="{44343DC6-30E4-4569-999A-C703F926F2AF}" type="datetimeFigureOut">
               <a:rPr lang="en-US" smtClean="0"/>
-              <a:t>8/20/2025</a:t>
+              <a:t>3/26/2026</a:t>
             </a:fld>
             <a:endParaRPr lang="en-US"/>
           </a:p>
@@ -2863,7 +2863,7 @@
           <a:p>
             <a:fld id="{44343DC6-30E4-4569-999A-C703F926F2AF}" type="datetimeFigureOut">
               <a:rPr lang="en-US" smtClean="0"/>
-              <a:t>8/20/2025</a:t>
+              <a:t>3/26/2026</a:t>
             </a:fld>
             <a:endParaRPr lang="en-US"/>
           </a:p>
@@ -2976,7 +2976,7 @@
           <a:p>
             <a:fld id="{44343DC6-30E4-4569-999A-C703F926F2AF}" type="datetimeFigureOut">
               <a:rPr lang="en-US" smtClean="0"/>
-              <a:t>8/20/2025</a:t>
+              <a:t>3/26/2026</a:t>
             </a:fld>
             <a:endParaRPr lang="en-US"/>
           </a:p>
@@ -3289,7 +3289,7 @@
           <a:p>
             <a:fld id="{44343DC6-30E4-4569-999A-C703F926F2AF}" type="datetimeFigureOut">
               <a:rPr lang="en-US" smtClean="0"/>
-              <a:t>8/20/2025</a:t>
+              <a:t>3/26/2026</a:t>
             </a:fld>
             <a:endParaRPr lang="en-US"/>
           </a:p>
@@ -3578,7 +3578,7 @@
           <a:p>
             <a:fld id="{44343DC6-30E4-4569-999A-C703F926F2AF}" type="datetimeFigureOut">
               <a:rPr lang="en-US" smtClean="0"/>
-              <a:t>8/20/2025</a:t>
+              <a:t>3/26/2026</a:t>
             </a:fld>
             <a:endParaRPr lang="en-US"/>
           </a:p>
@@ -3821,7 +3821,7 @@
           <a:p>
             <a:fld id="{44343DC6-30E4-4569-999A-C703F926F2AF}" type="datetimeFigureOut">
               <a:rPr lang="en-US" smtClean="0"/>
-              <a:t>8/20/2025</a:t>
+              <a:t>3/26/2026</a:t>
             </a:fld>
             <a:endParaRPr lang="en-US"/>
           </a:p>
@@ -4304,6 +4304,13 @@
   <p:clrMapOvr>
     <a:masterClrMapping/>
   </p:clrMapOvr>
+  <p:timing>
+    <p:tnLst>
+      <p:par>
+        <p:cTn id="1" dur="indefinite" restart="never" nodeType="tmRoot"/>
+      </p:par>
+    </p:tnLst>
+  </p:timing>
 </p:sld>
 </file>
 
@@ -4652,6 +4659,13 @@
   <p:clrMapOvr>
     <a:masterClrMapping/>
   </p:clrMapOvr>
+  <p:timing>
+    <p:tnLst>
+      <p:par>
+        <p:cTn id="1" dur="indefinite" restart="never" nodeType="tmRoot"/>
+      </p:par>
+    </p:tnLst>
+  </p:timing>
 </p:sld>
 </file>
 
@@ -7252,6 +7266,13 @@
   <p:clrMapOvr>
     <a:masterClrMapping/>
   </p:clrMapOvr>
+  <p:timing>
+    <p:tnLst>
+      <p:par>
+        <p:cTn id="1" dur="indefinite" restart="never" nodeType="tmRoot"/>
+      </p:par>
+    </p:tnLst>
+  </p:timing>
 </p:sld>
 </file>
 
@@ -7904,6 +7925,13 @@
   <p:clrMapOvr>
     <a:masterClrMapping/>
   </p:clrMapOvr>
+  <p:timing>
+    <p:tnLst>
+      <p:par>
+        <p:cTn id="1" dur="indefinite" restart="never" nodeType="tmRoot"/>
+      </p:par>
+    </p:tnLst>
+  </p:timing>
 </p:sld>
 </file>
 
@@ -8080,6 +8108,13 @@
   <p:clrMapOvr>
     <a:masterClrMapping/>
   </p:clrMapOvr>
+  <p:timing>
+    <p:tnLst>
+      <p:par>
+        <p:cTn id="1" dur="indefinite" restart="never" nodeType="tmRoot"/>
+      </p:par>
+    </p:tnLst>
+  </p:timing>
 </p:sld>
 </file>
 
@@ -8268,6 +8303,13 @@
   <p:clrMapOvr>
     <a:masterClrMapping/>
   </p:clrMapOvr>
+  <p:timing>
+    <p:tnLst>
+      <p:par>
+        <p:cTn id="1" dur="indefinite" restart="never" nodeType="tmRoot"/>
+      </p:par>
+    </p:tnLst>
+  </p:timing>
 </p:sld>
 </file>
 
@@ -8533,6 +8575,13 @@
   <p:clrMapOvr>
     <a:masterClrMapping/>
   </p:clrMapOvr>
+  <p:timing>
+    <p:tnLst>
+      <p:par>
+        <p:cTn id="1" dur="indefinite" restart="never" nodeType="tmRoot"/>
+      </p:par>
+    </p:tnLst>
+  </p:timing>
 </p:sld>
 </file>
 
@@ -8778,6 +8827,13 @@
   <p:clrMapOvr>
     <a:masterClrMapping/>
   </p:clrMapOvr>
+  <p:timing>
+    <p:tnLst>
+      <p:par>
+        <p:cTn id="1" dur="indefinite" restart="never" nodeType="tmRoot"/>
+      </p:par>
+    </p:tnLst>
+  </p:timing>
 </p:sld>
 </file>
 
@@ -9430,6 +9486,13 @@
   <p:clrMapOvr>
     <a:masterClrMapping/>
   </p:clrMapOvr>
+  <p:timing>
+    <p:tnLst>
+      <p:par>
+        <p:cTn id="1" dur="indefinite" restart="never" nodeType="tmRoot"/>
+      </p:par>
+    </p:tnLst>
+  </p:timing>
 </p:sld>
 </file>
 
@@ -9622,6 +9685,13 @@
   <p:clrMapOvr>
     <a:masterClrMapping/>
   </p:clrMapOvr>
+  <p:timing>
+    <p:tnLst>
+      <p:par>
+        <p:cTn id="1" dur="indefinite" restart="never" nodeType="tmRoot"/>
+      </p:par>
+    </p:tnLst>
+  </p:timing>
 </p:sld>
 </file>
 
@@ -9815,6 +9885,13 @@
   <p:clrMapOvr>
     <a:masterClrMapping/>
   </p:clrMapOvr>
+  <p:timing>
+    <p:tnLst>
+      <p:par>
+        <p:cTn id="1" dur="indefinite" restart="never" nodeType="tmRoot"/>
+      </p:par>
+    </p:tnLst>
+  </p:timing>
 </p:sld>
 </file>
 
@@ -10232,6 +10309,13 @@
   <p:clrMapOvr>
     <a:masterClrMapping/>
   </p:clrMapOvr>
+  <p:timing>
+    <p:tnLst>
+      <p:par>
+        <p:cTn id="1" dur="indefinite" restart="never" nodeType="tmRoot"/>
+      </p:par>
+    </p:tnLst>
+  </p:timing>
 </p:sld>
 </file>
 
@@ -10356,6 +10440,13 @@
   <p:clrMapOvr>
     <a:masterClrMapping/>
   </p:clrMapOvr>
+  <p:timing>
+    <p:tnLst>
+      <p:par>
+        <p:cTn id="1" dur="indefinite" restart="never" nodeType="tmRoot"/>
+      </p:par>
+    </p:tnLst>
+  </p:timing>
 </p:sld>
 </file>
 
@@ -10776,6 +10867,13 @@
   <p:clrMapOvr>
     <a:masterClrMapping/>
   </p:clrMapOvr>
+  <p:timing>
+    <p:tnLst>
+      <p:par>
+        <p:cTn id="1" dur="indefinite" restart="never" nodeType="tmRoot"/>
+      </p:par>
+    </p:tnLst>
+  </p:timing>
 </p:sld>
 </file>
 
@@ -11096,6 +11194,13 @@
   <p:clrMapOvr>
     <a:masterClrMapping/>
   </p:clrMapOvr>
+  <p:timing>
+    <p:tnLst>
+      <p:par>
+        <p:cTn id="1" dur="indefinite" restart="never" nodeType="tmRoot"/>
+      </p:par>
+    </p:tnLst>
+  </p:timing>
 </p:sld>
 </file>
 
@@ -11387,6 +11492,13 @@
   <p:clrMapOvr>
     <a:masterClrMapping/>
   </p:clrMapOvr>
+  <p:timing>
+    <p:tnLst>
+      <p:par>
+        <p:cTn id="1" dur="indefinite" restart="never" nodeType="tmRoot"/>
+      </p:par>
+    </p:tnLst>
+  </p:timing>
 </p:sld>
 </file>
 
@@ -11793,6 +11905,13 @@
   <p:clrMapOvr>
     <a:masterClrMapping/>
   </p:clrMapOvr>
+  <p:timing>
+    <p:tnLst>
+      <p:par>
+        <p:cTn id="1" dur="indefinite" restart="never" nodeType="tmRoot"/>
+      </p:par>
+    </p:tnLst>
+  </p:timing>
 </p:sld>
 </file>
 
@@ -12183,6 +12302,13 @@
   <p:clrMapOvr>
     <a:masterClrMapping/>
   </p:clrMapOvr>
+  <p:timing>
+    <p:tnLst>
+      <p:par>
+        <p:cTn id="1" dur="indefinite" restart="never" nodeType="tmRoot"/>
+      </p:par>
+    </p:tnLst>
+  </p:timing>
 </p:sld>
 </file>
 
@@ -12563,6 +12689,13 @@
   <p:clrMapOvr>
     <a:masterClrMapping/>
   </p:clrMapOvr>
+  <p:timing>
+    <p:tnLst>
+      <p:par>
+        <p:cTn id="1" dur="indefinite" restart="never" nodeType="tmRoot"/>
+      </p:par>
+    </p:tnLst>
+  </p:timing>
 </p:sld>
 </file>
 
@@ -13180,6 +13313,13 @@
   <p:clrMapOvr>
     <a:masterClrMapping/>
   </p:clrMapOvr>
+  <p:timing>
+    <p:tnLst>
+      <p:par>
+        <p:cTn id="1" dur="indefinite" restart="never" nodeType="tmRoot"/>
+      </p:par>
+    </p:tnLst>
+  </p:timing>
 </p:sld>
 </file>
 
